--- a/examples/mof-screening-slides/mof_screening_proposal.pptx
+++ b/examples/mof-screening-slides/mof_screening_proposal.pptx
@@ -22,9 +22,10 @@
     <p:sldId id="270" r:id="rId16"/>
     <p:sldId id="271" r:id="rId17"/>
     <p:sldId id="272" r:id="rId18"/>
+    <p:sldId id="273" r:id="rId19"/>
   </p:sldIdLst>
   <p:notesMasterIdLst>
-    <p:notesMasterId r:id="rId19"/>
+    <p:notesMasterId r:id="rId20"/>
   </p:notesMasterIdLst>
   <p:sldSz cx="12192000" cy="6858000"/>
   <p:notesSz cx="6858000" cy="12192000"/>
@@ -1222,7 +1223,7 @@
           <a:p>
             <a:r>
               <a:rPr lang="en-US" dirty="0"/>
-              <a:t>被追问细节时退回结论页或对应页码。</a:t>
+              <a:t>备被问“宏观上怎么用”时展开:微观吸附位点 → 床层 → 塔;涉及数据一律回到 P9–P12。</a:t>
             </a:r>
             <a:endParaRPr lang="en-US" dirty="0"/>
           </a:p>
@@ -1246,6 +1247,94 @@
             <a:fld id="{F7021451-1387-4CA6-816F-3879F97B5CBC}" type="slidenum">
               <a:rPr lang="en-US"/>
               <a:t>17</a:t>
+            </a:fld>
+            <a:endParaRPr lang="en-US"/>
+          </a:p>
+        </p:txBody>
+      </p:sp>
+    </p:spTree>
+    <p:extLst>
+      <p:ext uri="{BB962C8B-B14F-4D97-AF65-F5344CB8AC3E}">
+        <p14:creationId xmlns:p14="http://schemas.microsoft.com/office/powerpoint/2010/main" val="1024086991"/>
+      </p:ext>
+    </p:extLst>
+  </p:cSld>
+  <p:clrMapOvr>
+    <a:masterClrMapping/>
+  </p:clrMapOvr>
+</p:notes>
+</file>
+
+<file path=ppt/notesSlides/notesSlide18.xml><?xml version="1.0" encoding="utf-8"?>
+<p:notes xmlns:a="http://schemas.openxmlformats.org/drawingml/2006/main" xmlns:r="http://schemas.openxmlformats.org/officeDocument/2006/relationships" xmlns:p="http://schemas.openxmlformats.org/presentationml/2006/main">
+  <p:cSld>
+    <p:spTree>
+      <p:nvGrpSpPr>
+        <p:cNvPr id="1" name=""/>
+        <p:cNvGrpSpPr/>
+        <p:nvPr/>
+      </p:nvGrpSpPr>
+      <p:grpSpPr>
+        <a:xfrm>
+          <a:off x="0" y="0"/>
+          <a:ext cx="0" cy="0"/>
+          <a:chOff x="0" y="0"/>
+          <a:chExt cx="0" cy="0"/>
+        </a:xfrm>
+      </p:grpSpPr>
+      <p:sp>
+        <p:nvSpPr>
+          <p:cNvPr id="2" name="Slide Image Placeholder 1"/>
+          <p:cNvSpPr>
+            <a:spLocks noGrp="1" noRot="1" noChangeAspect="1"/>
+          </p:cNvSpPr>
+          <p:nvPr>
+            <p:ph type="sldImg"/>
+          </p:nvPr>
+        </p:nvSpPr>
+        <p:spPr/>
+      </p:sp>
+      <p:sp>
+        <p:nvSpPr>
+          <p:cNvPr id="3" name="Notes Placeholder 2"/>
+          <p:cNvSpPr>
+            <a:spLocks noGrp="1"/>
+          </p:cNvSpPr>
+          <p:nvPr>
+            <p:ph type="body" idx="1"/>
+          </p:nvPr>
+        </p:nvSpPr>
+        <p:spPr/>
+        <p:txBody>
+          <a:bodyPr/>
+          <a:lstStyle/>
+          <a:p>
+            <a:r>
+              <a:rPr lang="en-US" dirty="0"/>
+              <a:t>被追问细节时退回结论页或对应页码。</a:t>
+            </a:r>
+            <a:endParaRPr lang="en-US" dirty="0"/>
+          </a:p>
+        </p:txBody>
+      </p:sp>
+      <p:sp>
+        <p:nvSpPr>
+          <p:cNvPr id="4" name="Slide Number Placeholder 3"/>
+          <p:cNvSpPr>
+            <a:spLocks noGrp="1"/>
+          </p:cNvSpPr>
+          <p:nvPr>
+            <p:ph type="sldNum" sz="quarter" idx="10"/>
+          </p:nvPr>
+        </p:nvSpPr>
+        <p:spPr/>
+        <p:txBody>
+          <a:bodyPr/>
+          <a:lstStyle/>
+          <a:p>
+            <a:fld id="{F7021451-1387-4CA6-816F-3879F97B5CBC}" type="slidenum">
+              <a:rPr lang="en-US"/>
+              <a:t>18</a:t>
             </a:fld>
             <a:endParaRPr lang="en-US"/>
           </a:p>
@@ -3036,6 +3125,9 @@
   <p:clrMapOvr>
     <a:masterClrMapping/>
   </p:clrMapOvr>
+  <p:transition spd="med">
+    <p:fade/>
+  </p:transition>
 </p:sld>
 </file>
 
@@ -3725,7 +3817,7 @@
                 <a:ea typeface="Arial" pitchFamily="34" charset="-122"/>
                 <a:cs typeface="Arial" pitchFamily="34" charset="-120"/>
               </a:rPr>
-              <a:t>10 / 17</a:t>
+              <a:t>10 / 18</a:t>
             </a:r>
             <a:endParaRPr lang="en-US" sz="950" dirty="0"/>
           </a:p>
@@ -3736,6 +3828,9 @@
   <p:clrMapOvr>
     <a:masterClrMapping/>
   </p:clrMapOvr>
+  <p:transition spd="med">
+    <p:fade/>
+  </p:transition>
 </p:sld>
 </file>
 
@@ -5055,7 +5150,7 @@
                 <a:ea typeface="Arial" pitchFamily="34" charset="-122"/>
                 <a:cs typeface="Arial" pitchFamily="34" charset="-120"/>
               </a:rPr>
-              <a:t>11 / 17</a:t>
+              <a:t>11 / 18</a:t>
             </a:r>
             <a:endParaRPr lang="en-US" sz="950" dirty="0"/>
           </a:p>
@@ -5066,6 +5161,9 @@
   <p:clrMapOvr>
     <a:masterClrMapping/>
   </p:clrMapOvr>
+  <p:transition spd="med">
+    <p:fade/>
+  </p:transition>
 </p:sld>
 </file>
 
@@ -6338,7 +6436,7 @@
                 <a:ea typeface="Arial" pitchFamily="34" charset="-122"/>
                 <a:cs typeface="Arial" pitchFamily="34" charset="-120"/>
               </a:rPr>
-              <a:t>12 / 17</a:t>
+              <a:t>12 / 18</a:t>
             </a:r>
             <a:endParaRPr lang="en-US" sz="950" dirty="0"/>
           </a:p>
@@ -6349,6 +6447,9 @@
   <p:clrMapOvr>
     <a:masterClrMapping/>
   </p:clrMapOvr>
+  <p:transition spd="med">
+    <p:fade/>
+  </p:transition>
 </p:sld>
 </file>
 
@@ -7350,7 +7451,7 @@
                 <a:ea typeface="Arial" pitchFamily="34" charset="-122"/>
                 <a:cs typeface="Arial" pitchFamily="34" charset="-120"/>
               </a:rPr>
-              <a:t>13 / 17</a:t>
+              <a:t>13 / 18</a:t>
             </a:r>
             <a:endParaRPr lang="en-US" sz="950" dirty="0"/>
           </a:p>
@@ -7361,6 +7462,9 @@
   <p:clrMapOvr>
     <a:masterClrMapping/>
   </p:clrMapOvr>
+  <p:transition spd="med">
+    <p:fade/>
+  </p:transition>
 </p:sld>
 </file>
 
@@ -7948,7 +8052,7 @@
                 <a:ea typeface="Arial" pitchFamily="34" charset="-122"/>
                 <a:cs typeface="Arial" pitchFamily="34" charset="-120"/>
               </a:rPr>
-              <a:t>14 / 17</a:t>
+              <a:t>14 / 18</a:t>
             </a:r>
             <a:endParaRPr lang="en-US" sz="950" dirty="0"/>
           </a:p>
@@ -7959,6 +8063,9 @@
   <p:clrMapOvr>
     <a:masterClrMapping/>
   </p:clrMapOvr>
+  <p:transition spd="med">
+    <p:fade/>
+  </p:transition>
 </p:sld>
 </file>
 
@@ -9320,7 +9427,7 @@
                 <a:ea typeface="Arial" pitchFamily="34" charset="-122"/>
                 <a:cs typeface="Arial" pitchFamily="34" charset="-120"/>
               </a:rPr>
-              <a:t>15 / 17</a:t>
+              <a:t>15 / 18</a:t>
             </a:r>
             <a:endParaRPr lang="en-US" sz="950" dirty="0"/>
           </a:p>
@@ -9331,6 +9438,9 @@
   <p:clrMapOvr>
     <a:masterClrMapping/>
   </p:clrMapOvr>
+  <p:transition spd="med">
+    <p:fade/>
+  </p:transition>
 </p:sld>
 </file>
 
@@ -10080,7 +10190,7 @@
                 <a:ea typeface="Arial" pitchFamily="34" charset="-122"/>
                 <a:cs typeface="Arial" pitchFamily="34" charset="-120"/>
               </a:rPr>
-              <a:t>16 / 17</a:t>
+              <a:t>16 / 18</a:t>
             </a:r>
             <a:endParaRPr lang="en-US" sz="950" dirty="0"/>
           </a:p>
@@ -10091,12 +10201,802 @@
   <p:clrMapOvr>
     <a:masterClrMapping/>
   </p:clrMapOvr>
+  <p:transition spd="med">
+    <p:fade/>
+  </p:transition>
 </p:sld>
 </file>
 
 <file path=ppt/slides/slide17.xml><?xml version="1.0" encoding="utf-8"?>
 <p:sld xmlns:a="http://schemas.openxmlformats.org/drawingml/2006/main" xmlns:r="http://schemas.openxmlformats.org/officeDocument/2006/relationships" xmlns:p="http://schemas.openxmlformats.org/presentationml/2006/main">
   <p:cSld name="Slide 17">
+    <p:spTree>
+      <p:nvGrpSpPr>
+        <p:cNvPr id="1" name=""/>
+        <p:cNvGrpSpPr/>
+        <p:nvPr/>
+      </p:nvGrpSpPr>
+      <p:grpSpPr>
+        <a:xfrm>
+          <a:off x="0" y="0"/>
+          <a:ext cx="0" cy="0"/>
+          <a:chOff x="0" y="0"/>
+          <a:chExt cx="0" cy="0"/>
+        </a:xfrm>
+      </p:grpSpPr>
+      <p:sp>
+        <p:nvSpPr>
+          <p:cNvPr id="2" name="Shape 0"/>
+          <p:cNvSpPr/>
+          <p:nvPr/>
+        </p:nvSpPr>
+        <p:spPr>
+          <a:xfrm>
+            <a:off x="658368" y="489204"/>
+            <a:ext cx="91440" cy="91440"/>
+          </a:xfrm>
+          <a:prstGeom prst="rect">
+            <a:avLst/>
+          </a:prstGeom>
+          <a:solidFill>
+            <a:srgbClr val="C08A3E"/>
+          </a:solidFill>
+          <a:ln/>
+        </p:spPr>
+      </p:sp>
+      <p:sp>
+        <p:nvSpPr>
+          <p:cNvPr id="3" name="Text 1"/>
+          <p:cNvSpPr/>
+          <p:nvPr/>
+        </p:nvSpPr>
+        <p:spPr>
+          <a:xfrm>
+            <a:off x="841248" y="402336"/>
+            <a:ext cx="10689336" cy="274320"/>
+          </a:xfrm>
+          <a:prstGeom prst="rect">
+            <a:avLst/>
+          </a:prstGeom>
+          <a:noFill/>
+          <a:ln/>
+        </p:spPr>
+        <p:txBody>
+          <a:bodyPr wrap="square" lIns="0" tIns="0" rIns="0" bIns="0" rtlCol="0" anchor="ctr"/>
+          <a:lstStyle/>
+          <a:p>
+            <a:pPr indent="0" marL="0">
+              <a:buNone/>
+            </a:pPr>
+            <a:r>
+              <a:rPr lang="en-US" sz="1200" b="1" spc="200" kern="0" dirty="0">
+                <a:solidFill>
+                  <a:srgbClr val="2E7D6B"/>
+                </a:solidFill>
+                <a:latin typeface="Microsoft YaHei" pitchFamily="34" charset="0"/>
+                <a:ea typeface="Microsoft YaHei" pitchFamily="34" charset="-122"/>
+                <a:cs typeface="Microsoft YaHei" pitchFamily="34" charset="-120"/>
+              </a:rPr>
+              <a:t>附录</a:t>
+            </a:r>
+            <a:pPr indent="0" marL="0">
+              <a:buNone/>
+            </a:pPr>
+            <a:r>
+              <a:rPr lang="en-US" sz="1200" b="1" spc="200" kern="0" dirty="0">
+                <a:solidFill>
+                  <a:srgbClr val="2E7D6B"/>
+                </a:solidFill>
+                <a:latin typeface="Arial" pitchFamily="34" charset="0"/>
+                <a:ea typeface="Arial" pitchFamily="34" charset="-122"/>
+                <a:cs typeface="Arial" pitchFamily="34" charset="-120"/>
+              </a:rPr>
+              <a:t> A </a:t>
+            </a:r>
+            <a:pPr indent="0" marL="0">
+              <a:buNone/>
+            </a:pPr>
+            <a:r>
+              <a:rPr lang="en-US" sz="1200" b="1" spc="200" kern="0" dirty="0">
+                <a:solidFill>
+                  <a:srgbClr val="2E7D6B"/>
+                </a:solidFill>
+                <a:latin typeface="Microsoft YaHei" pitchFamily="34" charset="0"/>
+                <a:ea typeface="Microsoft YaHei" pitchFamily="34" charset="-122"/>
+                <a:cs typeface="Microsoft YaHei" pitchFamily="34" charset="-120"/>
+              </a:rPr>
+              <a:t>·</a:t>
+            </a:r>
+            <a:pPr indent="0" marL="0">
+              <a:buNone/>
+            </a:pPr>
+            <a:r>
+              <a:rPr lang="en-US" sz="1200" b="1" spc="200" kern="0" dirty="0">
+                <a:solidFill>
+                  <a:srgbClr val="2E7D6B"/>
+                </a:solidFill>
+                <a:latin typeface="Arial" pitchFamily="34" charset="0"/>
+                <a:ea typeface="Arial" pitchFamily="34" charset="-122"/>
+                <a:cs typeface="Arial" pitchFamily="34" charset="-120"/>
+              </a:rPr>
+              <a:t> </a:t>
+            </a:r>
+            <a:pPr indent="0" marL="0">
+              <a:buNone/>
+            </a:pPr>
+            <a:r>
+              <a:rPr lang="en-US" sz="1200" b="1" spc="200" kern="0" dirty="0">
+                <a:solidFill>
+                  <a:srgbClr val="2E7D6B"/>
+                </a:solidFill>
+                <a:latin typeface="Microsoft YaHei" pitchFamily="34" charset="0"/>
+                <a:ea typeface="Microsoft YaHei" pitchFamily="34" charset="-122"/>
+                <a:cs typeface="Microsoft YaHei" pitchFamily="34" charset="-120"/>
+              </a:rPr>
+              <a:t>概念示意</a:t>
+            </a:r>
+            <a:endParaRPr lang="en-US" sz="1200" dirty="0"/>
+          </a:p>
+        </p:txBody>
+      </p:sp>
+      <p:sp>
+        <p:nvSpPr>
+          <p:cNvPr id="4" name="Text 2"/>
+          <p:cNvSpPr/>
+          <p:nvPr/>
+        </p:nvSpPr>
+        <p:spPr>
+          <a:xfrm>
+            <a:off x="658368" y="768096"/>
+            <a:ext cx="10872216" cy="448564"/>
+          </a:xfrm>
+          <a:prstGeom prst="rect">
+            <a:avLst/>
+          </a:prstGeom>
+          <a:noFill/>
+          <a:ln/>
+        </p:spPr>
+        <p:txBody>
+          <a:bodyPr wrap="square" lIns="0" tIns="0" rIns="0" bIns="0" rtlCol="0" anchor="t"/>
+          <a:lstStyle/>
+          <a:p>
+            <a:pPr indent="0" marL="0">
+              <a:lnSpc>
+                <a:spcPct val="112000"/>
+              </a:lnSpc>
+              <a:buNone/>
+            </a:pPr>
+            <a:r>
+              <a:rPr lang="en-US" sz="2500" b="1" dirty="0">
+                <a:solidFill>
+                  <a:srgbClr val="1C4B3F"/>
+                </a:solidFill>
+                <a:latin typeface="Microsoft YaHei" pitchFamily="34" charset="0"/>
+                <a:ea typeface="Microsoft YaHei" pitchFamily="34" charset="-122"/>
+                <a:cs typeface="Microsoft YaHei" pitchFamily="34" charset="-120"/>
+              </a:rPr>
+              <a:t>物理图像</a:t>
+            </a:r>
+            <a:pPr indent="0" marL="0">
+              <a:lnSpc>
+                <a:spcPct val="112000"/>
+              </a:lnSpc>
+              <a:buNone/>
+            </a:pPr>
+            <a:r>
+              <a:rPr lang="en-US" sz="2500" b="1" dirty="0">
+                <a:solidFill>
+                  <a:srgbClr val="1C4B3F"/>
+                </a:solidFill>
+                <a:latin typeface="Arial" pitchFamily="34" charset="0"/>
+                <a:ea typeface="Arial" pitchFamily="34" charset="-122"/>
+                <a:cs typeface="Arial" pitchFamily="34" charset="-120"/>
+              </a:rPr>
+              <a:t>:</a:t>
+            </a:r>
+            <a:pPr indent="0" marL="0">
+              <a:lnSpc>
+                <a:spcPct val="112000"/>
+              </a:lnSpc>
+              <a:buNone/>
+            </a:pPr>
+            <a:r>
+              <a:rPr lang="en-US" sz="2500" b="1" dirty="0">
+                <a:solidFill>
+                  <a:srgbClr val="1C4B3F"/>
+                </a:solidFill>
+                <a:latin typeface="Microsoft YaHei" pitchFamily="34" charset="0"/>
+                <a:ea typeface="Microsoft YaHei" pitchFamily="34" charset="-122"/>
+                <a:cs typeface="Microsoft YaHei" pitchFamily="34" charset="-120"/>
+              </a:rPr>
+              <a:t>多孔晶格捕获</a:t>
+            </a:r>
+            <a:pPr indent="0" marL="0">
+              <a:lnSpc>
+                <a:spcPct val="112000"/>
+              </a:lnSpc>
+              <a:buNone/>
+            </a:pPr>
+            <a:r>
+              <a:rPr lang="en-US" sz="2500" b="1" dirty="0">
+                <a:solidFill>
+                  <a:srgbClr val="1C4B3F"/>
+                </a:solidFill>
+                <a:latin typeface="Arial" pitchFamily="34" charset="0"/>
+                <a:ea typeface="Arial" pitchFamily="34" charset="-122"/>
+                <a:cs typeface="Arial" pitchFamily="34" charset="-120"/>
+              </a:rPr>
+              <a:t> CO₂,</a:t>
+            </a:r>
+            <a:pPr indent="0" marL="0">
+              <a:lnSpc>
+                <a:spcPct val="112000"/>
+              </a:lnSpc>
+              <a:buNone/>
+            </a:pPr>
+            <a:r>
+              <a:rPr lang="en-US" sz="2500" b="1" dirty="0">
+                <a:solidFill>
+                  <a:srgbClr val="1C4B3F"/>
+                </a:solidFill>
+                <a:latin typeface="Microsoft YaHei" pitchFamily="34" charset="0"/>
+                <a:ea typeface="Microsoft YaHei" pitchFamily="34" charset="-122"/>
+                <a:cs typeface="Microsoft YaHei" pitchFamily="34" charset="-120"/>
+              </a:rPr>
+              <a:t>床层化实现工程放大</a:t>
+            </a:r>
+            <a:endParaRPr lang="en-US" sz="2500" dirty="0"/>
+          </a:p>
+        </p:txBody>
+      </p:sp>
+      <p:sp>
+        <p:nvSpPr>
+          <p:cNvPr id="5" name="Shape 3"/>
+          <p:cNvSpPr/>
+          <p:nvPr/>
+        </p:nvSpPr>
+        <p:spPr>
+          <a:xfrm>
+            <a:off x="621792" y="1564132"/>
+            <a:ext cx="10945368" cy="3104194"/>
+          </a:xfrm>
+          <a:prstGeom prst="rect">
+            <a:avLst/>
+          </a:prstGeom>
+          <a:solidFill>
+            <a:srgbClr val="FFFFFF"/>
+          </a:solidFill>
+          <a:ln w="12700">
+            <a:solidFill>
+              <a:srgbClr val="D8E2DD"/>
+            </a:solidFill>
+            <a:prstDash val="solid"/>
+          </a:ln>
+        </p:spPr>
+      </p:sp>
+      <p:pic>
+        <p:nvPicPr>
+          <p:cNvPr id="6" name="Image 0" descr="assets/ai/concept_duo.png">    </p:cNvPr>
+          <p:cNvPicPr>
+            <a:picLocks noChangeAspect="1"/>
+          </p:cNvPicPr>
+          <p:nvPr/>
+        </p:nvPicPr>
+        <p:blipFill>
+          <a:blip r:embed="rId1"/>
+          <a:stretch>
+            <a:fillRect/>
+          </a:stretch>
+        </p:blipFill>
+        <p:spPr>
+          <a:xfrm>
+            <a:off x="658368" y="1600708"/>
+            <a:ext cx="10872216" cy="3031042"/>
+          </a:xfrm>
+          <a:prstGeom prst="rect">
+            <a:avLst/>
+          </a:prstGeom>
+        </p:spPr>
+      </p:pic>
+      <p:sp>
+        <p:nvSpPr>
+          <p:cNvPr id="7" name="Text 4"/>
+          <p:cNvSpPr/>
+          <p:nvPr/>
+        </p:nvSpPr>
+        <p:spPr>
+          <a:xfrm>
+            <a:off x="658368" y="4723190"/>
+            <a:ext cx="10872216" cy="308356"/>
+          </a:xfrm>
+          <a:prstGeom prst="rect">
+            <a:avLst/>
+          </a:prstGeom>
+          <a:noFill/>
+          <a:ln/>
+        </p:spPr>
+        <p:txBody>
+          <a:bodyPr wrap="square" lIns="0" tIns="0" rIns="0" bIns="0" rtlCol="0" anchor="ctr"/>
+          <a:lstStyle/>
+          <a:p>
+            <a:pPr algn="ctr" indent="0" marL="0">
+              <a:buNone/>
+            </a:pPr>
+            <a:r>
+              <a:rPr lang="en-US" sz="1150" dirty="0">
+                <a:solidFill>
+                  <a:srgbClr val="6F7873"/>
+                </a:solidFill>
+                <a:latin typeface="Microsoft YaHei" pitchFamily="34" charset="0"/>
+                <a:ea typeface="Microsoft YaHei" pitchFamily="34" charset="-122"/>
+                <a:cs typeface="Microsoft YaHei" pitchFamily="34" charset="-120"/>
+              </a:rPr>
+              <a:t>图</a:t>
+            </a:r>
+            <a:pPr algn="ctr" indent="0" marL="0">
+              <a:buNone/>
+            </a:pPr>
+            <a:r>
+              <a:rPr lang="en-US" sz="1150" dirty="0">
+                <a:solidFill>
+                  <a:srgbClr val="6F7873"/>
+                </a:solidFill>
+                <a:latin typeface="Arial" pitchFamily="34" charset="0"/>
+                <a:ea typeface="Arial" pitchFamily="34" charset="-122"/>
+                <a:cs typeface="Arial" pitchFamily="34" charset="-120"/>
+              </a:rPr>
+              <a:t> 3  </a:t>
+            </a:r>
+            <a:pPr algn="ctr" indent="0" marL="0">
+              <a:buNone/>
+            </a:pPr>
+            <a:r>
+              <a:rPr lang="en-US" sz="1150" dirty="0">
+                <a:solidFill>
+                  <a:srgbClr val="6F7873"/>
+                </a:solidFill>
+                <a:latin typeface="Microsoft YaHei" pitchFamily="34" charset="0"/>
+                <a:ea typeface="Microsoft YaHei" pitchFamily="34" charset="-122"/>
+                <a:cs typeface="Microsoft YaHei" pitchFamily="34" charset="-120"/>
+              </a:rPr>
+              <a:t>微观晶格吸附</a:t>
+            </a:r>
+            <a:pPr algn="ctr" indent="0" marL="0">
+              <a:buNone/>
+            </a:pPr>
+            <a:r>
+              <a:rPr lang="en-US" sz="1150" dirty="0">
+                <a:solidFill>
+                  <a:srgbClr val="6F7873"/>
+                </a:solidFill>
+                <a:latin typeface="Arial" pitchFamily="34" charset="0"/>
+                <a:ea typeface="Arial" pitchFamily="34" charset="-122"/>
+                <a:cs typeface="Arial" pitchFamily="34" charset="-120"/>
+              </a:rPr>
+              <a:t>(a)</a:t>
+            </a:r>
+            <a:pPr algn="ctr" indent="0" marL="0">
+              <a:buNone/>
+            </a:pPr>
+            <a:r>
+              <a:rPr lang="en-US" sz="1150" dirty="0">
+                <a:solidFill>
+                  <a:srgbClr val="6F7873"/>
+                </a:solidFill>
+                <a:latin typeface="Microsoft YaHei" pitchFamily="34" charset="0"/>
+                <a:ea typeface="Microsoft YaHei" pitchFamily="34" charset="-122"/>
+                <a:cs typeface="Microsoft YaHei" pitchFamily="34" charset="-120"/>
+              </a:rPr>
+              <a:t>与吸附塔床层工程化</a:t>
+            </a:r>
+            <a:pPr algn="ctr" indent="0" marL="0">
+              <a:buNone/>
+            </a:pPr>
+            <a:r>
+              <a:rPr lang="en-US" sz="1150" dirty="0">
+                <a:solidFill>
+                  <a:srgbClr val="6F7873"/>
+                </a:solidFill>
+                <a:latin typeface="Arial" pitchFamily="34" charset="0"/>
+                <a:ea typeface="Arial" pitchFamily="34" charset="-122"/>
+                <a:cs typeface="Arial" pitchFamily="34" charset="-120"/>
+              </a:rPr>
+              <a:t>(b)</a:t>
+            </a:r>
+            <a:pPr algn="ctr" indent="0" marL="0">
+              <a:buNone/>
+            </a:pPr>
+            <a:r>
+              <a:rPr lang="en-US" sz="1150" dirty="0">
+                <a:solidFill>
+                  <a:srgbClr val="6F7873"/>
+                </a:solidFill>
+                <a:latin typeface="Microsoft YaHei" pitchFamily="34" charset="0"/>
+                <a:ea typeface="Microsoft YaHei" pitchFamily="34" charset="-122"/>
+                <a:cs typeface="Microsoft YaHei" pitchFamily="34" charset="-120"/>
+              </a:rPr>
+              <a:t>的概念示意</a:t>
+            </a:r>
+            <a:pPr algn="ctr" indent="0" marL="0">
+              <a:buNone/>
+            </a:pPr>
+            <a:r>
+              <a:rPr lang="en-US" sz="1150" dirty="0">
+                <a:solidFill>
+                  <a:srgbClr val="6F7873"/>
+                </a:solidFill>
+                <a:latin typeface="Arial" pitchFamily="34" charset="0"/>
+                <a:ea typeface="Arial" pitchFamily="34" charset="-122"/>
+                <a:cs typeface="Arial" pitchFamily="34" charset="-120"/>
+              </a:rPr>
+              <a:t>(qwen-image-2.0-pro / AI </a:t>
+            </a:r>
+            <a:pPr algn="ctr" indent="0" marL="0">
+              <a:buNone/>
+            </a:pPr>
+            <a:r>
+              <a:rPr lang="en-US" sz="1150" dirty="0">
+                <a:solidFill>
+                  <a:srgbClr val="6F7873"/>
+                </a:solidFill>
+                <a:latin typeface="Microsoft YaHei" pitchFamily="34" charset="0"/>
+                <a:ea typeface="Microsoft YaHei" pitchFamily="34" charset="-122"/>
+                <a:cs typeface="Microsoft YaHei" pitchFamily="34" charset="-120"/>
+              </a:rPr>
+              <a:t>生成</a:t>
+            </a:r>
+            <a:pPr algn="ctr" indent="0" marL="0">
+              <a:buNone/>
+            </a:pPr>
+            <a:r>
+              <a:rPr lang="en-US" sz="1150" dirty="0">
+                <a:solidFill>
+                  <a:srgbClr val="6F7873"/>
+                </a:solidFill>
+                <a:latin typeface="Arial" pitchFamily="34" charset="0"/>
+                <a:ea typeface="Arial" pitchFamily="34" charset="-122"/>
+                <a:cs typeface="Arial" pitchFamily="34" charset="-120"/>
+              </a:rPr>
+              <a:t>(</a:t>
+            </a:r>
+            <a:pPr algn="ctr" indent="0" marL="0">
+              <a:buNone/>
+            </a:pPr>
+            <a:r>
+              <a:rPr lang="en-US" sz="1150" dirty="0">
+                <a:solidFill>
+                  <a:srgbClr val="6F7873"/>
+                </a:solidFill>
+                <a:latin typeface="Microsoft YaHei" pitchFamily="34" charset="0"/>
+                <a:ea typeface="Microsoft YaHei" pitchFamily="34" charset="-122"/>
+                <a:cs typeface="Microsoft YaHei" pitchFamily="34" charset="-120"/>
+              </a:rPr>
+              <a:t>示意</a:t>
+            </a:r>
+            <a:pPr algn="ctr" indent="0" marL="0">
+              <a:buNone/>
+            </a:pPr>
+            <a:r>
+              <a:rPr lang="en-US" sz="1150" dirty="0">
+                <a:solidFill>
+                  <a:srgbClr val="6F7873"/>
+                </a:solidFill>
+                <a:latin typeface="Arial" pitchFamily="34" charset="0"/>
+                <a:ea typeface="Arial" pitchFamily="34" charset="-122"/>
+                <a:cs typeface="Arial" pitchFamily="34" charset="-120"/>
+              </a:rPr>
+              <a:t>))</a:t>
+            </a:r>
+            <a:endParaRPr lang="en-US" sz="1150" dirty="0"/>
+          </a:p>
+        </p:txBody>
+      </p:sp>
+      <p:sp>
+        <p:nvSpPr>
+          <p:cNvPr id="8" name="Text 5"/>
+          <p:cNvSpPr/>
+          <p:nvPr/>
+        </p:nvSpPr>
+        <p:spPr>
+          <a:xfrm>
+            <a:off x="658368" y="5232714"/>
+            <a:ext cx="10872216" cy="252476"/>
+          </a:xfrm>
+          <a:prstGeom prst="rect">
+            <a:avLst/>
+          </a:prstGeom>
+          <a:noFill/>
+          <a:ln/>
+        </p:spPr>
+        <p:txBody>
+          <a:bodyPr wrap="square" lIns="0" tIns="0" rIns="0" bIns="0" rtlCol="0" anchor="t"/>
+          <a:lstStyle/>
+          <a:p>
+            <a:pPr algn="l" indent="0" marL="0">
+              <a:lnSpc>
+                <a:spcPct val="122000"/>
+              </a:lnSpc>
+              <a:buNone/>
+            </a:pPr>
+            <a:r>
+              <a:rPr lang="en-US" sz="1250" dirty="0">
+                <a:solidFill>
+                  <a:srgbClr val="6F7873"/>
+                </a:solidFill>
+                <a:latin typeface="Microsoft YaHei" pitchFamily="34" charset="0"/>
+                <a:ea typeface="Microsoft YaHei" pitchFamily="34" charset="-122"/>
+                <a:cs typeface="Microsoft YaHei" pitchFamily="34" charset="-120"/>
+              </a:rPr>
+              <a:t>概念图仅用于建立物理直觉</a:t>
+            </a:r>
+            <a:pPr algn="l" indent="0" marL="0">
+              <a:lnSpc>
+                <a:spcPct val="122000"/>
+              </a:lnSpc>
+              <a:buNone/>
+            </a:pPr>
+            <a:r>
+              <a:rPr lang="en-US" sz="1250" dirty="0">
+                <a:solidFill>
+                  <a:srgbClr val="6F7873"/>
+                </a:solidFill>
+                <a:latin typeface="Arial" pitchFamily="34" charset="0"/>
+                <a:ea typeface="Arial" pitchFamily="34" charset="-122"/>
+                <a:cs typeface="Arial" pitchFamily="34" charset="-120"/>
+              </a:rPr>
+              <a:t>,</a:t>
+            </a:r>
+            <a:pPr algn="l" indent="0" marL="0">
+              <a:lnSpc>
+                <a:spcPct val="122000"/>
+              </a:lnSpc>
+              <a:buNone/>
+            </a:pPr>
+            <a:r>
+              <a:rPr lang="en-US" sz="1250" dirty="0">
+                <a:solidFill>
+                  <a:srgbClr val="6F7873"/>
+                </a:solidFill>
+                <a:latin typeface="Microsoft YaHei" pitchFamily="34" charset="0"/>
+                <a:ea typeface="Microsoft YaHei" pitchFamily="34" charset="-122"/>
+                <a:cs typeface="Microsoft YaHei" pitchFamily="34" charset="-120"/>
+              </a:rPr>
+              <a:t>不承载数据</a:t>
+            </a:r>
+            <a:pPr algn="l" indent="0" marL="0">
+              <a:lnSpc>
+                <a:spcPct val="122000"/>
+              </a:lnSpc>
+              <a:buNone/>
+            </a:pPr>
+            <a:r>
+              <a:rPr lang="en-US" sz="1250" dirty="0">
+                <a:solidFill>
+                  <a:srgbClr val="6F7873"/>
+                </a:solidFill>
+                <a:latin typeface="Arial" pitchFamily="34" charset="0"/>
+                <a:ea typeface="Arial" pitchFamily="34" charset="-122"/>
+                <a:cs typeface="Arial" pitchFamily="34" charset="-120"/>
+              </a:rPr>
+              <a:t>;</a:t>
+            </a:r>
+            <a:pPr algn="l" indent="0" marL="0">
+              <a:lnSpc>
+                <a:spcPct val="122000"/>
+              </a:lnSpc>
+              <a:buNone/>
+            </a:pPr>
+            <a:r>
+              <a:rPr lang="en-US" sz="1250" dirty="0">
+                <a:solidFill>
+                  <a:srgbClr val="6F7873"/>
+                </a:solidFill>
+                <a:latin typeface="Microsoft YaHei" pitchFamily="34" charset="0"/>
+                <a:ea typeface="Microsoft YaHei" pitchFamily="34" charset="-122"/>
+                <a:cs typeface="Microsoft YaHei" pitchFamily="34" charset="-120"/>
+              </a:rPr>
+              <a:t>单张分别生成后由</a:t>
+            </a:r>
+            <a:pPr algn="l" indent="0" marL="0">
+              <a:lnSpc>
+                <a:spcPct val="122000"/>
+              </a:lnSpc>
+              <a:buNone/>
+            </a:pPr>
+            <a:r>
+              <a:rPr lang="en-US" sz="1250" dirty="0">
+                <a:solidFill>
+                  <a:srgbClr val="6F7873"/>
+                </a:solidFill>
+                <a:latin typeface="Arial" pitchFamily="34" charset="0"/>
+                <a:ea typeface="Arial" pitchFamily="34" charset="-122"/>
+                <a:cs typeface="Arial" pitchFamily="34" charset="-120"/>
+              </a:rPr>
+              <a:t> collage </a:t>
+            </a:r>
+            <a:pPr algn="l" indent="0" marL="0">
+              <a:lnSpc>
+                <a:spcPct val="122000"/>
+              </a:lnSpc>
+              <a:buNone/>
+            </a:pPr>
+            <a:r>
+              <a:rPr lang="en-US" sz="1250" dirty="0">
+                <a:solidFill>
+                  <a:srgbClr val="6F7873"/>
+                </a:solidFill>
+                <a:latin typeface="Microsoft YaHei" pitchFamily="34" charset="0"/>
+                <a:ea typeface="Microsoft YaHei" pitchFamily="34" charset="-122"/>
+                <a:cs typeface="Microsoft YaHei" pitchFamily="34" charset="-120"/>
+              </a:rPr>
+              <a:t>确定性拼版。</a:t>
+            </a:r>
+            <a:endParaRPr lang="en-US" sz="1250" dirty="0"/>
+          </a:p>
+        </p:txBody>
+      </p:sp>
+      <p:sp>
+        <p:nvSpPr>
+          <p:cNvPr id="9" name="Text 6"/>
+          <p:cNvSpPr/>
+          <p:nvPr/>
+        </p:nvSpPr>
+        <p:spPr>
+          <a:xfrm>
+            <a:off x="658368" y="6455664"/>
+            <a:ext cx="6858000" cy="274320"/>
+          </a:xfrm>
+          <a:prstGeom prst="rect">
+            <a:avLst/>
+          </a:prstGeom>
+          <a:noFill/>
+          <a:ln/>
+        </p:spPr>
+        <p:txBody>
+          <a:bodyPr wrap="square" lIns="0" tIns="0" rIns="0" bIns="0" rtlCol="0" anchor="ctr"/>
+          <a:lstStyle/>
+          <a:p>
+            <a:pPr algn="l" indent="0" marL="0">
+              <a:buNone/>
+            </a:pPr>
+            <a:r>
+              <a:rPr lang="en-US" sz="950" dirty="0">
+                <a:solidFill>
+                  <a:srgbClr val="9BA49F"/>
+                </a:solidFill>
+                <a:latin typeface="Arial" pitchFamily="34" charset="0"/>
+                <a:ea typeface="Arial" pitchFamily="34" charset="-122"/>
+                <a:cs typeface="Arial" pitchFamily="34" charset="-120"/>
+              </a:rPr>
+              <a:t>MOF </a:t>
+            </a:r>
+            <a:pPr algn="l" indent="0" marL="0">
+              <a:buNone/>
+            </a:pPr>
+            <a:r>
+              <a:rPr lang="en-US" sz="950" dirty="0">
+                <a:solidFill>
+                  <a:srgbClr val="9BA49F"/>
+                </a:solidFill>
+                <a:latin typeface="Microsoft YaHei" pitchFamily="34" charset="0"/>
+                <a:ea typeface="Microsoft YaHei" pitchFamily="34" charset="-122"/>
+                <a:cs typeface="Microsoft YaHei" pitchFamily="34" charset="-120"/>
+              </a:rPr>
+              <a:t>高通量筛选</a:t>
+            </a:r>
+            <a:pPr algn="l" indent="0" marL="0">
+              <a:buNone/>
+            </a:pPr>
+            <a:r>
+              <a:rPr lang="en-US" sz="950" dirty="0">
+                <a:solidFill>
+                  <a:srgbClr val="9BA49F"/>
+                </a:solidFill>
+                <a:latin typeface="Arial" pitchFamily="34" charset="0"/>
+                <a:ea typeface="Arial" pitchFamily="34" charset="-122"/>
+                <a:cs typeface="Arial" pitchFamily="34" charset="-120"/>
+              </a:rPr>
+              <a:t> </a:t>
+            </a:r>
+            <a:pPr algn="l" indent="0" marL="0">
+              <a:buNone/>
+            </a:pPr>
+            <a:r>
+              <a:rPr lang="en-US" sz="950" dirty="0">
+                <a:solidFill>
+                  <a:srgbClr val="9BA49F"/>
+                </a:solidFill>
+                <a:latin typeface="Microsoft YaHei" pitchFamily="34" charset="0"/>
+                <a:ea typeface="Microsoft YaHei" pitchFamily="34" charset="-122"/>
+                <a:cs typeface="Microsoft YaHei" pitchFamily="34" charset="-120"/>
+              </a:rPr>
+              <a:t>·</a:t>
+            </a:r>
+            <a:pPr algn="l" indent="0" marL="0">
+              <a:buNone/>
+            </a:pPr>
+            <a:r>
+              <a:rPr lang="en-US" sz="950" dirty="0">
+                <a:solidFill>
+                  <a:srgbClr val="9BA49F"/>
+                </a:solidFill>
+                <a:latin typeface="Arial" pitchFamily="34" charset="0"/>
+                <a:ea typeface="Arial" pitchFamily="34" charset="-122"/>
+                <a:cs typeface="Arial" pitchFamily="34" charset="-120"/>
+              </a:rPr>
+              <a:t> </a:t>
+            </a:r>
+            <a:pPr algn="l" indent="0" marL="0">
+              <a:buNone/>
+            </a:pPr>
+            <a:r>
+              <a:rPr lang="en-US" sz="950" dirty="0">
+                <a:solidFill>
+                  <a:srgbClr val="9BA49F"/>
+                </a:solidFill>
+                <a:latin typeface="Microsoft YaHei" pitchFamily="34" charset="0"/>
+                <a:ea typeface="Microsoft YaHei" pitchFamily="34" charset="-122"/>
+                <a:cs typeface="Microsoft YaHei" pitchFamily="34" charset="-120"/>
+              </a:rPr>
+              <a:t>总结</a:t>
+            </a:r>
+            <a:endParaRPr lang="en-US" sz="950" dirty="0"/>
+          </a:p>
+        </p:txBody>
+      </p:sp>
+      <p:sp>
+        <p:nvSpPr>
+          <p:cNvPr id="10" name="Text 7"/>
+          <p:cNvSpPr/>
+          <p:nvPr/>
+        </p:nvSpPr>
+        <p:spPr>
+          <a:xfrm>
+            <a:off x="10433304" y="6455664"/>
+            <a:ext cx="1097280" cy="274320"/>
+          </a:xfrm>
+          <a:prstGeom prst="rect">
+            <a:avLst/>
+          </a:prstGeom>
+          <a:noFill/>
+          <a:ln/>
+        </p:spPr>
+        <p:txBody>
+          <a:bodyPr wrap="square" lIns="0" tIns="0" rIns="0" bIns="0" rtlCol="0" anchor="ctr"/>
+          <a:lstStyle/>
+          <a:p>
+            <a:pPr algn="r" indent="0" marL="0">
+              <a:buNone/>
+            </a:pPr>
+            <a:r>
+              <a:rPr lang="en-US" sz="950" dirty="0">
+                <a:solidFill>
+                  <a:srgbClr val="9BA49F"/>
+                </a:solidFill>
+                <a:latin typeface="Arial" pitchFamily="34" charset="0"/>
+                <a:ea typeface="Arial" pitchFamily="34" charset="-122"/>
+                <a:cs typeface="Arial" pitchFamily="34" charset="-120"/>
+              </a:rPr>
+              <a:t>17 / 18</a:t>
+            </a:r>
+            <a:endParaRPr lang="en-US" sz="950" dirty="0"/>
+          </a:p>
+        </p:txBody>
+      </p:sp>
+    </p:spTree>
+  </p:cSld>
+  <p:clrMapOvr>
+    <a:masterClrMapping/>
+  </p:clrMapOvr>
+  <p:transition spd="med">
+    <p:fade/>
+  </p:transition>
+</p:sld>
+</file>
+
+<file path=ppt/slides/slide18.xml><?xml version="1.0" encoding="utf-8"?>
+<p:sld xmlns:a="http://schemas.openxmlformats.org/drawingml/2006/main" xmlns:r="http://schemas.openxmlformats.org/officeDocument/2006/relationships" xmlns:p="http://schemas.openxmlformats.org/presentationml/2006/main">
+  <p:cSld name="Slide 18">
     <p:bg>
       <p:bgPr>
         <a:solidFill>
@@ -10395,6 +11295,9 @@
   <p:clrMapOvr>
     <a:masterClrMapping/>
   </p:clrMapOvr>
+  <p:transition spd="med">
+    <p:fade/>
+  </p:transition>
 </p:sld>
 </file>
 
@@ -11396,7 +12299,7 @@
                 <a:ea typeface="Arial" pitchFamily="34" charset="-122"/>
                 <a:cs typeface="Arial" pitchFamily="34" charset="-120"/>
               </a:rPr>
-              <a:t>02 / 17</a:t>
+              <a:t>02 / 18</a:t>
             </a:r>
             <a:endParaRPr lang="en-US" sz="950" dirty="0"/>
           </a:p>
@@ -11407,6 +12310,9 @@
   <p:clrMapOvr>
     <a:masterClrMapping/>
   </p:clrMapOvr>
+  <p:transition spd="med">
+    <p:fade/>
+  </p:transition>
 </p:sld>
 </file>
 
@@ -11994,7 +12900,7 @@
                 <a:ea typeface="Arial" pitchFamily="34" charset="-122"/>
                 <a:cs typeface="Arial" pitchFamily="34" charset="-120"/>
               </a:rPr>
-              <a:t>03 / 17</a:t>
+              <a:t>03 / 18</a:t>
             </a:r>
             <a:endParaRPr lang="en-US" sz="950" dirty="0"/>
           </a:p>
@@ -12005,6 +12911,9 @@
   <p:clrMapOvr>
     <a:masterClrMapping/>
   </p:clrMapOvr>
+  <p:transition spd="med">
+    <p:fade/>
+  </p:transition>
 </p:sld>
 </file>
 
@@ -13100,7 +14009,7 @@
                 <a:ea typeface="Arial" pitchFamily="34" charset="-122"/>
                 <a:cs typeface="Arial" pitchFamily="34" charset="-120"/>
               </a:rPr>
-              <a:t>04 / 17</a:t>
+              <a:t>04 / 18</a:t>
             </a:r>
             <a:endParaRPr lang="en-US" sz="950" dirty="0"/>
           </a:p>
@@ -13111,6 +14020,9 @@
   <p:clrMapOvr>
     <a:masterClrMapping/>
   </p:clrMapOvr>
+  <p:transition spd="med">
+    <p:fade/>
+  </p:transition>
 </p:sld>
 </file>
 
@@ -14538,7 +15450,7 @@
                 <a:ea typeface="Arial" pitchFamily="34" charset="-122"/>
                 <a:cs typeface="Arial" pitchFamily="34" charset="-120"/>
               </a:rPr>
-              <a:t>05 / 17</a:t>
+              <a:t>05 / 18</a:t>
             </a:r>
             <a:endParaRPr lang="en-US" sz="950" dirty="0"/>
           </a:p>
@@ -14549,6 +15461,9 @@
   <p:clrMapOvr>
     <a:masterClrMapping/>
   </p:clrMapOvr>
+  <p:transition spd="med">
+    <p:fade/>
+  </p:transition>
 </p:sld>
 </file>
 
@@ -15238,7 +16153,7 @@
                 <a:ea typeface="Arial" pitchFamily="34" charset="-122"/>
                 <a:cs typeface="Arial" pitchFamily="34" charset="-120"/>
               </a:rPr>
-              <a:t>06 / 17</a:t>
+              <a:t>06 / 18</a:t>
             </a:r>
             <a:endParaRPr lang="en-US" sz="950" dirty="0"/>
           </a:p>
@@ -15249,6 +16164,9 @@
   <p:clrMapOvr>
     <a:masterClrMapping/>
   </p:clrMapOvr>
+  <p:transition spd="med">
+    <p:fade/>
+  </p:transition>
 </p:sld>
 </file>
 
@@ -17049,7 +17967,7 @@
                 <a:ea typeface="Arial" pitchFamily="34" charset="-122"/>
                 <a:cs typeface="Arial" pitchFamily="34" charset="-120"/>
               </a:rPr>
-              <a:t>07 / 17</a:t>
+              <a:t>07 / 18</a:t>
             </a:r>
             <a:endParaRPr lang="en-US" sz="950" dirty="0"/>
           </a:p>
@@ -17060,6 +17978,9 @@
   <p:clrMapOvr>
     <a:masterClrMapping/>
   </p:clrMapOvr>
+  <p:transition spd="med">
+    <p:fade/>
+  </p:transition>
 </p:sld>
 </file>
 
@@ -17947,7 +18868,7 @@
                 <a:ea typeface="Arial" pitchFamily="34" charset="-122"/>
                 <a:cs typeface="Arial" pitchFamily="34" charset="-120"/>
               </a:rPr>
-              <a:t>08 / 17</a:t>
+              <a:t>08 / 18</a:t>
             </a:r>
             <a:endParaRPr lang="en-US" sz="950" dirty="0"/>
           </a:p>
@@ -17958,6 +18879,9 @@
   <p:clrMapOvr>
     <a:masterClrMapping/>
   </p:clrMapOvr>
+  <p:transition spd="med">
+    <p:fade/>
+  </p:transition>
 </p:sld>
 </file>
 
@@ -19072,7 +19996,7 @@
                 <a:ea typeface="Arial" pitchFamily="34" charset="-122"/>
                 <a:cs typeface="Arial" pitchFamily="34" charset="-120"/>
               </a:rPr>
-              <a:t>09 / 17</a:t>
+              <a:t>09 / 18</a:t>
             </a:r>
             <a:endParaRPr lang="en-US" sz="950" dirty="0"/>
           </a:p>
@@ -19083,6 +20007,9 @@
   <p:clrMapOvr>
     <a:masterClrMapping/>
   </p:clrMapOvr>
+  <p:transition spd="med">
+    <p:fade/>
+  </p:transition>
 </p:sld>
 </file>
 
